--- a/public/brand/documents/ASANYX_Presentation.pptx
+++ b/public/brand/documents/ASANYX_Presentation.pptx
@@ -3107,7 +3107,7 @@
             <a:avLst/>
           </a:prstGeom>
           <a:solidFill>
-            <a:srgbClr val="0A2540"/>
+            <a:srgbClr val="0B2A6B"/>
           </a:solidFill>
           <a:ln>
             <a:noFill/>
@@ -3150,7 +3150,7 @@
             <a:avLst/>
           </a:prstGeom>
           <a:solidFill>
-            <a:srgbClr val="1E6BFF"/>
+            <a:srgbClr val="1257C7"/>
           </a:solidFill>
           <a:ln>
             <a:noFill/>
@@ -3195,7 +3195,7 @@
         <p:spPr>
           <a:xfrm>
             <a:off x="548640" y="457200"/>
-            <a:ext cx="1962920" cy="822960"/>
+            <a:ext cx="2028224" cy="822960"/>
           </a:xfrm>
           <a:prstGeom prst="rect">
             <a:avLst/>
@@ -3334,7 +3334,7 @@
             <a:avLst/>
           </a:prstGeom>
           <a:solidFill>
-            <a:srgbClr val="F6F9FC"/>
+            <a:srgbClr val="F7F9FC"/>
           </a:solidFill>
           <a:ln>
             <a:noFill/>
@@ -3377,7 +3377,7 @@
             <a:avLst/>
           </a:prstGeom>
           <a:solidFill>
-            <a:srgbClr val="1E6BFF"/>
+            <a:srgbClr val="1257C7"/>
           </a:solidFill>
           <a:ln>
             <a:noFill/>
@@ -3422,7 +3422,7 @@
         <p:spPr>
           <a:xfrm>
             <a:off x="640080" y="457200"/>
-            <a:ext cx="1489549" cy="594360"/>
+            <a:ext cx="1543751" cy="594360"/>
           </a:xfrm>
           <a:prstGeom prst="rect">
             <a:avLst/>
@@ -3454,7 +3454,7 @@
             <a:r>
               <a:rPr sz="1400" b="1">
                 <a:solidFill>
-                  <a:srgbClr val="1E6BFF"/>
+                  <a:srgbClr val="1257C7"/>
                 </a:solidFill>
               </a:rPr>
               <a:t>01  ·  SECTION</a:t>
@@ -3487,7 +3487,7 @@
             <a:r>
               <a:rPr sz="4400" b="1">
                 <a:solidFill>
-                  <a:srgbClr val="0A2540"/>
+                  <a:srgbClr val="0B2A6B"/>
                 </a:solidFill>
               </a:rPr>
               <a:t>Section title goes here</a:t>
@@ -3520,7 +3520,7 @@
             <a:r>
               <a:rPr sz="1800" b="0">
                 <a:solidFill>
-                  <a:srgbClr val="64748B"/>
+                  <a:srgbClr val="6B7A99"/>
                 </a:solidFill>
               </a:rPr>
               <a:t>Optional supporting statement for this section — one sentence that frames the narrative for the slides that follow.</a:t>
@@ -3604,7 +3604,7 @@
             <a:avLst/>
           </a:prstGeom>
           <a:solidFill>
-            <a:srgbClr val="0A2540"/>
+            <a:srgbClr val="0B2A6B"/>
           </a:solidFill>
           <a:ln>
             <a:noFill/>
@@ -3649,7 +3649,7 @@
         <p:spPr>
           <a:xfrm>
             <a:off x="457200" y="201168"/>
-            <a:ext cx="1199562" cy="502920"/>
+            <a:ext cx="1239470" cy="502920"/>
           </a:xfrm>
           <a:prstGeom prst="rect">
             <a:avLst/>
@@ -3714,7 +3714,7 @@
             <a:r>
               <a:rPr sz="3200" b="1">
                 <a:solidFill>
-                  <a:srgbClr val="0A2540"/>
+                  <a:srgbClr val="0B2A6B"/>
                 </a:solidFill>
               </a:rPr>
               <a:t>Slide title — one line</a:t>
@@ -3747,7 +3747,7 @@
             <a:r>
               <a:rPr sz="1400" b="0">
                 <a:solidFill>
-                  <a:srgbClr val="64748B"/>
+                  <a:srgbClr val="6B7A99"/>
                 </a:solidFill>
               </a:rPr>
               <a:t>Supporting subtitle or one-liner context.</a:t>
@@ -3770,7 +3770,7 @@
             <a:avLst/>
           </a:prstGeom>
           <a:solidFill>
-            <a:srgbClr val="F6F9FC"/>
+            <a:srgbClr val="F7F9FC"/>
           </a:solidFill>
           <a:ln>
             <a:noFill/>
@@ -3813,7 +3813,7 @@
             <a:avLst/>
           </a:prstGeom>
           <a:solidFill>
-            <a:srgbClr val="1E6BFF"/>
+            <a:srgbClr val="1257C7"/>
           </a:solidFill>
           <a:ln>
             <a:noFill/>
@@ -3866,7 +3866,7 @@
             <a:r>
               <a:rPr sz="1200" b="1">
                 <a:solidFill>
-                  <a:srgbClr val="1E6BFF"/>
+                  <a:srgbClr val="1257C7"/>
                 </a:solidFill>
               </a:rPr>
               <a:t>01</a:t>
@@ -3899,7 +3899,7 @@
             <a:r>
               <a:rPr sz="2200" b="1">
                 <a:solidFill>
-                  <a:srgbClr val="0A2540"/>
+                  <a:srgbClr val="0B2A6B"/>
                 </a:solidFill>
               </a:rPr>
               <a:t>Discover</a:t>
@@ -3932,7 +3932,7 @@
             <a:r>
               <a:rPr sz="1300" b="0">
                 <a:solidFill>
-                  <a:srgbClr val="64748B"/>
+                  <a:srgbClr val="6B7A99"/>
                 </a:solidFill>
               </a:rPr>
               <a:t>Understand goals, users and current-state data landscape.</a:t>
@@ -3955,7 +3955,7 @@
             <a:avLst/>
           </a:prstGeom>
           <a:solidFill>
-            <a:srgbClr val="F6F9FC"/>
+            <a:srgbClr val="F7F9FC"/>
           </a:solidFill>
           <a:ln>
             <a:noFill/>
@@ -3998,7 +3998,7 @@
             <a:avLst/>
           </a:prstGeom>
           <a:solidFill>
-            <a:srgbClr val="1E6BFF"/>
+            <a:srgbClr val="1257C7"/>
           </a:solidFill>
           <a:ln>
             <a:noFill/>
@@ -4051,7 +4051,7 @@
             <a:r>
               <a:rPr sz="1200" b="1">
                 <a:solidFill>
-                  <a:srgbClr val="1E6BFF"/>
+                  <a:srgbClr val="1257C7"/>
                 </a:solidFill>
               </a:rPr>
               <a:t>02</a:t>
@@ -4084,7 +4084,7 @@
             <a:r>
               <a:rPr sz="2200" b="1">
                 <a:solidFill>
-                  <a:srgbClr val="0A2540"/>
+                  <a:srgbClr val="0B2A6B"/>
                 </a:solidFill>
               </a:rPr>
               <a:t>Design</a:t>
@@ -4117,7 +4117,7 @@
             <a:r>
               <a:rPr sz="1300" b="0">
                 <a:solidFill>
-                  <a:srgbClr val="64748B"/>
+                  <a:srgbClr val="6B7A99"/>
                 </a:solidFill>
               </a:rPr>
               <a:t>Semantic models, dashboards and pipelines built on modern stack.</a:t>
@@ -4140,7 +4140,7 @@
             <a:avLst/>
           </a:prstGeom>
           <a:solidFill>
-            <a:srgbClr val="F6F9FC"/>
+            <a:srgbClr val="F7F9FC"/>
           </a:solidFill>
           <a:ln>
             <a:noFill/>
@@ -4183,7 +4183,7 @@
             <a:avLst/>
           </a:prstGeom>
           <a:solidFill>
-            <a:srgbClr val="1E6BFF"/>
+            <a:srgbClr val="1257C7"/>
           </a:solidFill>
           <a:ln>
             <a:noFill/>
@@ -4236,7 +4236,7 @@
             <a:r>
               <a:rPr sz="1200" b="1">
                 <a:solidFill>
-                  <a:srgbClr val="1E6BFF"/>
+                  <a:srgbClr val="1257C7"/>
                 </a:solidFill>
               </a:rPr>
               <a:t>03</a:t>
@@ -4269,7 +4269,7 @@
             <a:r>
               <a:rPr sz="2200" b="1">
                 <a:solidFill>
-                  <a:srgbClr val="0A2540"/>
+                  <a:srgbClr val="0B2A6B"/>
                 </a:solidFill>
               </a:rPr>
               <a:t>Deliver</a:t>
@@ -4302,7 +4302,7 @@
             <a:r>
               <a:rPr sz="1300" b="0">
                 <a:solidFill>
-                  <a:srgbClr val="64748B"/>
+                  <a:srgbClr val="6B7A99"/>
                 </a:solidFill>
               </a:rPr>
               <a:t>Migration, rollout and adoption with measurable business impact.</a:t>
@@ -4335,7 +4335,7 @@
             <a:r>
               <a:rPr sz="1000" b="0">
                 <a:solidFill>
-                  <a:srgbClr val="64748B"/>
+                  <a:srgbClr val="6B7A99"/>
                 </a:solidFill>
               </a:rPr>
               <a:t>ASANYX Analytics   ·   www.asanyxanalytics.com</a:t>
@@ -4419,7 +4419,7 @@
             <a:avLst/>
           </a:prstGeom>
           <a:solidFill>
-            <a:srgbClr val="0A2540"/>
+            <a:srgbClr val="0B2A6B"/>
           </a:solidFill>
           <a:ln>
             <a:noFill/>
@@ -4464,7 +4464,7 @@
         <p:spPr>
           <a:xfrm>
             <a:off x="457200" y="201168"/>
-            <a:ext cx="1199562" cy="502920"/>
+            <a:ext cx="1239470" cy="502920"/>
           </a:xfrm>
           <a:prstGeom prst="rect">
             <a:avLst/>
@@ -4496,7 +4496,7 @@
             <a:r>
               <a:rPr sz="3200" b="1">
                 <a:solidFill>
-                  <a:srgbClr val="0A2540"/>
+                  <a:srgbClr val="0B2A6B"/>
                 </a:solidFill>
               </a:rPr>
               <a:t>Why ASANYX</a:t>
@@ -4529,7 +4529,7 @@
             <a:r>
               <a:rPr sz="1200" b="1">
                 <a:solidFill>
-                  <a:srgbClr val="1E6BFF"/>
+                  <a:srgbClr val="1257C7"/>
                 </a:solidFill>
               </a:rPr>
               <a:t>PRACTITIONER-LED</a:t>
@@ -4562,7 +4562,7 @@
             <a:r>
               <a:rPr sz="1500" b="0">
                 <a:solidFill>
-                  <a:srgbClr val="0F172A"/>
+                  <a:srgbClr val="0B1B3A"/>
                 </a:solidFill>
               </a:rPr>
               <a:t>Every engagement is led by senior data &amp; BI practitioners who have delivered enterprise analytics programs across BFSI, retail, logistics and edtech — no juniors, no hand-offs.</a:t>
@@ -4595,7 +4595,7 @@
             <a:r>
               <a:rPr sz="1200" b="1">
                 <a:solidFill>
-                  <a:srgbClr val="1E6BFF"/>
+                  <a:srgbClr val="1257C7"/>
                 </a:solidFill>
               </a:rPr>
               <a:t>OUTCOME OBSESSED</a:t>
@@ -4628,7 +4628,7 @@
             <a:r>
               <a:rPr sz="1500" b="0">
                 <a:solidFill>
-                  <a:srgbClr val="0F172A"/>
+                  <a:srgbClr val="0B1B3A"/>
                 </a:solidFill>
               </a:rPr>
               <a:t>We anchor projects to measurable business outcomes — cost saved, cycle time cut, revenue unlocked — not just dashboards shipped.</a:t>
@@ -4669,7 +4669,7 @@
             <a:avLst/>
           </a:prstGeom>
           <a:solidFill>
-            <a:srgbClr val="0A2540"/>
+            <a:srgbClr val="0B2A6B"/>
           </a:solidFill>
           <a:ln>
             <a:noFill/>
@@ -4712,7 +4712,7 @@
             <a:avLst/>
           </a:prstGeom>
           <a:solidFill>
-            <a:srgbClr val="1E6BFF"/>
+            <a:srgbClr val="1257C7"/>
           </a:solidFill>
           <a:ln>
             <a:noFill/>
@@ -4845,7 +4845,7 @@
             <a:avLst/>
           </a:prstGeom>
           <a:solidFill>
-            <a:srgbClr val="1E6BFF"/>
+            <a:srgbClr val="1257C7"/>
           </a:solidFill>
           <a:ln>
             <a:noFill/>
